--- a/docs/Презентация_HabitQuest.pptx
+++ b/docs/Презентация_HabitQuest.pptx
@@ -5499,7 +5499,7 @@
         <p:spPr>
           <a:xfrm>
             <a:off x="640080" y="1691640"/>
-            <a:ext cx="10881360" cy="4114800"/>
+            <a:ext cx="10881360" cy="4572000"/>
           </a:xfrm>
           <a:prstGeom prst="rect">
             <a:avLst/>
@@ -5543,7 +5543,7 @@
         <p:spPr>
           <a:xfrm>
             <a:off x="841248" y="1837944"/>
-            <a:ext cx="10479024" cy="3822192"/>
+            <a:ext cx="10479024" cy="4279392"/>
           </a:xfrm>
           <a:prstGeom prst="rect">
             <a:avLst/>
@@ -6083,7 +6083,7 @@
         <p:spPr>
           <a:xfrm>
             <a:off x="640080" y="1691640"/>
-            <a:ext cx="10881360" cy="4114800"/>
+            <a:ext cx="10881360" cy="4572000"/>
           </a:xfrm>
           <a:prstGeom prst="rect">
             <a:avLst/>
@@ -6127,7 +6127,7 @@
         <p:spPr>
           <a:xfrm>
             <a:off x="841248" y="1837944"/>
-            <a:ext cx="10479024" cy="3822192"/>
+            <a:ext cx="10479024" cy="4279392"/>
           </a:xfrm>
           <a:prstGeom prst="rect">
             <a:avLst/>
@@ -6326,7 +6326,7 @@
                 </a:solidFill>
                 <a:latin typeface="Consolas"/>
               </a:rPr>
-              <a:t/>
+              <a:t>  const response = await fetch(SERVER_URL + '/api' + path, {</a:t>
             </a:r>
           </a:p>
           <a:p>
@@ -6345,7 +6345,7 @@
                 </a:solidFill>
                 <a:latin typeface="Consolas"/>
               </a:rPr>
-              <a:t>  const response = await fetch(SERVER_URL + '/api' + path, {</a:t>
+              <a:t>    ...options, headers,</a:t>
             </a:r>
           </a:p>
           <a:p>
@@ -6364,7 +6364,7 @@
                 </a:solidFill>
                 <a:latin typeface="Consolas"/>
               </a:rPr>
-              <a:t>    ...options, headers,</a:t>
+              <a:t>  })</a:t>
             </a:r>
           </a:p>
           <a:p>
@@ -6383,26 +6383,7 @@
                 </a:solidFill>
                 <a:latin typeface="Consolas"/>
               </a:rPr>
-              <a:t>  })</a:t>
-            </a:r>
-          </a:p>
-          <a:p>
-            <a:pPr>
-              <a:lnSpc>
-                <a:spcPct val="100000"/>
-              </a:lnSpc>
-              <a:spcAft>
-                <a:spcPts val="0"/>
-              </a:spcAft>
-            </a:pPr>
-            <a:r>
-              <a:rPr sz="1800">
-                <a:solidFill>
-                  <a:srgbClr val="E2E8F0"/>
-                </a:solidFill>
-                <a:latin typeface="Consolas"/>
-              </a:rPr>
-              <a:t>  if (!response.ok) throw new ApiError(...)  // понятный текст</a:t>
+              <a:t>  if (!response.ok) throw new ApiError(...)</a:t>
             </a:r>
           </a:p>
           <a:p>
@@ -6686,7 +6667,7 @@
         <p:spPr>
           <a:xfrm>
             <a:off x="640080" y="1691640"/>
-            <a:ext cx="10881360" cy="4114800"/>
+            <a:ext cx="10881360" cy="4572000"/>
           </a:xfrm>
           <a:prstGeom prst="rect">
             <a:avLst/>
@@ -6730,7 +6711,7 @@
         <p:spPr>
           <a:xfrm>
             <a:off x="841248" y="1837944"/>
-            <a:ext cx="10479024" cy="3822192"/>
+            <a:ext cx="10479024" cy="4279392"/>
           </a:xfrm>
           <a:prstGeom prst="rect">
             <a:avLst/>
@@ -8003,7 +7984,7 @@
         <p:spPr>
           <a:xfrm>
             <a:off x="8503920" y="2103120"/>
-            <a:ext cx="3017520" cy="3291840"/>
+            <a:ext cx="3017520" cy="3520440"/>
           </a:xfrm>
           <a:prstGeom prst="rect">
             <a:avLst/>
@@ -8088,8 +8069,8 @@
         </p:nvSpPr>
         <p:spPr>
           <a:xfrm>
-            <a:off x="8732520" y="2697480"/>
-            <a:ext cx="2560320" cy="2560320"/>
+            <a:off x="8732520" y="2743200"/>
+            <a:ext cx="2743200" cy="2788920"/>
           </a:xfrm>
           <a:prstGeom prst="rect">
             <a:avLst/>
@@ -8104,29 +8085,29 @@
           <a:p>
             <a:pPr algn="l">
               <a:lnSpc>
-                <a:spcPct val="100000"/>
-              </a:lnSpc>
-              <a:spcAft>
-                <a:spcPts val="0"/>
-              </a:spcAft>
-            </a:pPr>
-            <a:r>
-              <a:rPr sz="1800" b="1">
-                <a:solidFill>
-                  <a:srgbClr val="0F172A"/>
+                <a:spcPct val="110000"/>
+              </a:lnSpc>
+              <a:spcAft>
+                <a:spcPts val="600"/>
+              </a:spcAft>
+            </a:pPr>
+            <a:r>
+              <a:rPr sz="1600" b="0">
+                <a:solidFill>
+                  <a:srgbClr val="64748B"/>
                 </a:solidFill>
                 <a:latin typeface="Segoe UI"/>
               </a:rPr>
-              <a:t>users</a:t>
+              <a:t>users — учётные записи</a:t>
             </a:r>
           </a:p>
           <a:p>
             <a:pPr algn="l">
               <a:lnSpc>
-                <a:spcPct val="100000"/>
-              </a:lnSpc>
-              <a:spcAft>
-                <a:spcPts val="0"/>
+                <a:spcPct val="110000"/>
+              </a:lnSpc>
+              <a:spcAft>
+                <a:spcPts val="600"/>
               </a:spcAft>
             </a:pPr>
             <a:r>
@@ -8136,35 +8117,35 @@
                 </a:solidFill>
                 <a:latin typeface="Segoe UI"/>
               </a:rPr>
-              <a:t>учётные записи</a:t>
+              <a:t>habits — привычки</a:t>
             </a:r>
           </a:p>
           <a:p>
             <a:pPr algn="l">
               <a:lnSpc>
-                <a:spcPct val="100000"/>
-              </a:lnSpc>
-              <a:spcAft>
-                <a:spcPts val="0"/>
-              </a:spcAft>
-            </a:pPr>
-            <a:r>
-              <a:rPr sz="1800" b="1">
-                <a:solidFill>
-                  <a:srgbClr val="0F172A"/>
+                <a:spcPct val="110000"/>
+              </a:lnSpc>
+              <a:spcAft>
+                <a:spcPts val="600"/>
+              </a:spcAft>
+            </a:pPr>
+            <a:r>
+              <a:rPr sz="1600" b="0">
+                <a:solidFill>
+                  <a:srgbClr val="64748B"/>
                 </a:solidFill>
                 <a:latin typeface="Segoe UI"/>
               </a:rPr>
-              <a:t>habits</a:t>
+              <a:t>habit_completions — отметки</a:t>
             </a:r>
           </a:p>
           <a:p>
             <a:pPr algn="l">
               <a:lnSpc>
-                <a:spcPct val="100000"/>
-              </a:lnSpc>
-              <a:spcAft>
-                <a:spcPts val="0"/>
+                <a:spcPct val="110000"/>
+              </a:lnSpc>
+              <a:spcAft>
+                <a:spcPts val="600"/>
               </a:spcAft>
             </a:pPr>
             <a:r>
@@ -8174,35 +8155,35 @@
                 </a:solidFill>
                 <a:latin typeface="Segoe UI"/>
               </a:rPr>
-              <a:t>привычки</a:t>
+              <a:t>categories — категории</a:t>
             </a:r>
           </a:p>
           <a:p>
             <a:pPr algn="l">
               <a:lnSpc>
-                <a:spcPct val="100000"/>
-              </a:lnSpc>
-              <a:spcAft>
-                <a:spcPts val="0"/>
-              </a:spcAft>
-            </a:pPr>
-            <a:r>
-              <a:rPr sz="1800" b="1">
-                <a:solidFill>
-                  <a:srgbClr val="0F172A"/>
+                <a:spcPct val="110000"/>
+              </a:lnSpc>
+              <a:spcAft>
+                <a:spcPts val="600"/>
+              </a:spcAft>
+            </a:pPr>
+            <a:r>
+              <a:rPr sz="1600" b="0">
+                <a:solidFill>
+                  <a:srgbClr val="64748B"/>
                 </a:solidFill>
                 <a:latin typeface="Segoe UI"/>
               </a:rPr>
-              <a:t>habit_completions</a:t>
+              <a:t>achievements — достижения</a:t>
             </a:r>
           </a:p>
           <a:p>
             <a:pPr algn="l">
               <a:lnSpc>
-                <a:spcPct val="100000"/>
-              </a:lnSpc>
-              <a:spcAft>
-                <a:spcPts val="0"/>
+                <a:spcPct val="110000"/>
+              </a:lnSpc>
+              <a:spcAft>
+                <a:spcPts val="600"/>
               </a:spcAft>
             </a:pPr>
             <a:r>
@@ -8212,121 +8193,7 @@
                 </a:solidFill>
                 <a:latin typeface="Segoe UI"/>
               </a:rPr>
-              <a:t>история выполнения</a:t>
-            </a:r>
-          </a:p>
-          <a:p>
-            <a:pPr algn="l">
-              <a:lnSpc>
-                <a:spcPct val="100000"/>
-              </a:lnSpc>
-              <a:spcAft>
-                <a:spcPts val="0"/>
-              </a:spcAft>
-            </a:pPr>
-            <a:r>
-              <a:rPr sz="1800" b="1">
-                <a:solidFill>
-                  <a:srgbClr val="0F172A"/>
-                </a:solidFill>
-                <a:latin typeface="Segoe UI"/>
-              </a:rPr>
-              <a:t>categories</a:t>
-            </a:r>
-          </a:p>
-          <a:p>
-            <a:pPr algn="l">
-              <a:lnSpc>
-                <a:spcPct val="100000"/>
-              </a:lnSpc>
-              <a:spcAft>
-                <a:spcPts val="0"/>
-              </a:spcAft>
-            </a:pPr>
-            <a:r>
-              <a:rPr sz="1600" b="0">
-                <a:solidFill>
-                  <a:srgbClr val="64748B"/>
-                </a:solidFill>
-                <a:latin typeface="Segoe UI"/>
-              </a:rPr>
-              <a:t>категории</a:t>
-            </a:r>
-          </a:p>
-          <a:p>
-            <a:pPr algn="l">
-              <a:lnSpc>
-                <a:spcPct val="100000"/>
-              </a:lnSpc>
-              <a:spcAft>
-                <a:spcPts val="0"/>
-              </a:spcAft>
-            </a:pPr>
-            <a:r>
-              <a:rPr sz="1800" b="1">
-                <a:solidFill>
-                  <a:srgbClr val="0F172A"/>
-                </a:solidFill>
-                <a:latin typeface="Segoe UI"/>
-              </a:rPr>
-              <a:t>achievements</a:t>
-            </a:r>
-          </a:p>
-          <a:p>
-            <a:pPr algn="l">
-              <a:lnSpc>
-                <a:spcPct val="100000"/>
-              </a:lnSpc>
-              <a:spcAft>
-                <a:spcPts val="0"/>
-              </a:spcAft>
-            </a:pPr>
-            <a:r>
-              <a:rPr sz="1600" b="0">
-                <a:solidFill>
-                  <a:srgbClr val="64748B"/>
-                </a:solidFill>
-                <a:latin typeface="Segoe UI"/>
-              </a:rPr>
-              <a:t>достижения</a:t>
-            </a:r>
-          </a:p>
-          <a:p>
-            <a:pPr algn="l">
-              <a:lnSpc>
-                <a:spcPct val="100000"/>
-              </a:lnSpc>
-              <a:spcAft>
-                <a:spcPts val="0"/>
-              </a:spcAft>
-            </a:pPr>
-            <a:r>
-              <a:rPr sz="1800" b="1">
-                <a:solidFill>
-                  <a:srgbClr val="0F172A"/>
-                </a:solidFill>
-                <a:latin typeface="Segoe UI"/>
-              </a:rPr>
-              <a:t>user_achievements</a:t>
-            </a:r>
-          </a:p>
-          <a:p>
-            <a:pPr algn="l">
-              <a:lnSpc>
-                <a:spcPct val="100000"/>
-              </a:lnSpc>
-              <a:spcAft>
-                <a:spcPts val="0"/>
-              </a:spcAft>
-            </a:pPr>
-            <a:r>
-              <a:rPr sz="1600" b="0">
-                <a:solidFill>
-                  <a:srgbClr val="64748B"/>
-                </a:solidFill>
-                <a:latin typeface="Segoe UI"/>
-              </a:rPr>
-              <a:t>кто что получил</a:t>
+              <a:t>user_achievements — награды</a:t>
             </a:r>
           </a:p>
         </p:txBody>
@@ -9428,7 +9295,7 @@
         <p:spPr>
           <a:xfrm>
             <a:off x="640080" y="3794760"/>
-            <a:ext cx="5349240" cy="2331720"/>
+            <a:ext cx="5349240" cy="2514600"/>
           </a:xfrm>
           <a:prstGeom prst="rect">
             <a:avLst/>
@@ -9514,7 +9381,7 @@
         <p:spPr>
           <a:xfrm>
             <a:off x="914400" y="4526280"/>
-            <a:ext cx="4846320" cy="1463040"/>
+            <a:ext cx="4846320" cy="1691640"/>
           </a:xfrm>
           <a:prstGeom prst="rect">
             <a:avLst/>
@@ -9532,11 +9399,11 @@
                 <a:spcPct val="105000"/>
               </a:lnSpc>
               <a:spcAft>
-                <a:spcPts val="800"/>
-              </a:spcAft>
-            </a:pPr>
-            <a:r>
-              <a:rPr sz="1900" b="1">
+                <a:spcPts val="1000"/>
+              </a:spcAft>
+            </a:pPr>
+            <a:r>
+              <a:rPr sz="1800" b="1">
                 <a:solidFill>
                   <a:srgbClr val="6366F1"/>
                 </a:solidFill>
@@ -9545,13 +9412,13 @@
               <a:t>•  </a:t>
             </a:r>
             <a:r>
-              <a:rPr sz="1900">
+              <a:rPr sz="1800">
                 <a:solidFill>
                   <a:srgbClr val="0F172A"/>
                 </a:solidFill>
                 <a:latin typeface="Segoe UI"/>
               </a:rPr>
-              <a:t>Пароли хранятся только в виде хеша bcrypt</a:t>
+              <a:t>Пароли хранятся в виде хеша bcrypt</a:t>
             </a:r>
           </a:p>
           <a:p>
@@ -9560,11 +9427,11 @@
                 <a:spcPct val="105000"/>
               </a:lnSpc>
               <a:spcAft>
-                <a:spcPts val="800"/>
-              </a:spcAft>
-            </a:pPr>
-            <a:r>
-              <a:rPr sz="1900" b="1">
+                <a:spcPts val="1000"/>
+              </a:spcAft>
+            </a:pPr>
+            <a:r>
+              <a:rPr sz="1800" b="1">
                 <a:solidFill>
                   <a:srgbClr val="6366F1"/>
                 </a:solidFill>
@@ -9573,13 +9440,13 @@
               <a:t>•  </a:t>
             </a:r>
             <a:r>
-              <a:rPr sz="1900">
+              <a:rPr sz="1800">
                 <a:solidFill>
                   <a:srgbClr val="0F172A"/>
                 </a:solidFill>
                 <a:latin typeface="Segoe UI"/>
               </a:rPr>
-              <a:t>Запросы к базе идут через ORM — SQL-инъекции невозможны</a:t>
+              <a:t>Запросы идут через ORM — инъекции невозможны</a:t>
             </a:r>
           </a:p>
           <a:p>
@@ -9588,11 +9455,11 @@
                 <a:spcPct val="105000"/>
               </a:lnSpc>
               <a:spcAft>
-                <a:spcPts val="800"/>
-              </a:spcAft>
-            </a:pPr>
-            <a:r>
-              <a:rPr sz="1900" b="1">
+                <a:spcPts val="1000"/>
+              </a:spcAft>
+            </a:pPr>
+            <a:r>
+              <a:rPr sz="1800" b="1">
                 <a:solidFill>
                   <a:srgbClr val="6366F1"/>
                 </a:solidFill>
@@ -9601,7 +9468,7 @@
               <a:t>•  </a:t>
             </a:r>
             <a:r>
-              <a:rPr sz="1900">
+              <a:rPr sz="1800">
                 <a:solidFill>
                   <a:srgbClr val="0F172A"/>
                 </a:solidFill>
@@ -9621,7 +9488,7 @@
         <p:spPr>
           <a:xfrm>
             <a:off x="6263640" y="3794760"/>
-            <a:ext cx="5257800" cy="2331720"/>
+            <a:ext cx="5257800" cy="2514600"/>
           </a:xfrm>
           <a:prstGeom prst="rect">
             <a:avLst/>
@@ -9707,7 +9574,7 @@
         <p:spPr>
           <a:xfrm>
             <a:off x="6537960" y="4526280"/>
-            <a:ext cx="4754880" cy="1371600"/>
+            <a:ext cx="4754880" cy="1691640"/>
           </a:xfrm>
           <a:prstGeom prst="rect">
             <a:avLst/>
@@ -9722,21 +9589,23 @@
           <a:p>
             <a:pPr algn="l">
               <a:lnSpc>
-                <a:spcPct val="120000"/>
-              </a:lnSpc>
-              <a:spcAft>
-                <a:spcPts val="800"/>
-              </a:spcAft>
-            </a:pPr>
-            <a:r>
-              <a:rPr sz="1800" b="0">
+                <a:spcPct val="115000"/>
+              </a:lnSpc>
+              <a:spcAft>
+                <a:spcPts val="400"/>
+              </a:spcAft>
+            </a:pPr>
+            <a:r>
+              <a:rPr sz="1700" b="0">
                 <a:solidFill>
                   <a:srgbClr val="64748B"/>
                 </a:solidFill>
                 <a:latin typeface="Consolas"/>
               </a:rPr>
-              <a:t>DATABASE_URL · SECRET_KEY · ALGORITHM
-ACCESS_TOKEN_EXPIRE_MINUTES · CORS_ORIGINS</a:t>
+              <a:t>DATABASE_URL
+SECRET_KEY
+ALGORITHM
+CORS_ORIGINS</a:t>
             </a:r>
           </a:p>
         </p:txBody>
@@ -14759,7 +14628,7 @@
         <p:spPr>
           <a:xfrm>
             <a:off x="914400" y="2514600"/>
-            <a:ext cx="4846320" cy="1463040"/>
+            <a:ext cx="4846320" cy="1783080"/>
           </a:xfrm>
           <a:prstGeom prst="rect">
             <a:avLst/>
@@ -14774,7 +14643,7 @@
           <a:p>
             <a:pPr algn="l">
               <a:lnSpc>
-                <a:spcPct val="115000"/>
+                <a:spcPct val="110000"/>
               </a:lnSpc>
               <a:spcAft>
                 <a:spcPts val="800"/>
@@ -14800,8 +14669,8 @@
         </p:nvSpPr>
         <p:spPr>
           <a:xfrm>
-            <a:off x="914400" y="4023360"/>
-            <a:ext cx="4846320" cy="1463040"/>
+            <a:off x="914400" y="4434840"/>
+            <a:ext cx="4846320" cy="1097280"/>
           </a:xfrm>
           <a:prstGeom prst="rect">
             <a:avLst/>
@@ -14816,7 +14685,7 @@
           <a:p>
             <a:pPr algn="l">
               <a:lnSpc>
-                <a:spcPct val="115000"/>
+                <a:spcPct val="110000"/>
               </a:lnSpc>
               <a:spcAft>
                 <a:spcPts val="800"/>
@@ -15340,7 +15209,7 @@
         <p:spPr>
           <a:xfrm>
             <a:off x="640080" y="1737360"/>
-            <a:ext cx="3456432" cy="1965960"/>
+            <a:ext cx="3456432" cy="2240280"/>
           </a:xfrm>
           <a:prstGeom prst="rect">
             <a:avLst/>
@@ -15427,8 +15296,8 @@
         </p:nvSpPr>
         <p:spPr>
           <a:xfrm>
-            <a:off x="868680" y="2011680"/>
-            <a:ext cx="3017520" cy="457200"/>
+            <a:off x="868680" y="1993392"/>
+            <a:ext cx="3017520" cy="502920"/>
           </a:xfrm>
           <a:prstGeom prst="rect">
             <a:avLst/>
@@ -15469,8 +15338,8 @@
         </p:nvSpPr>
         <p:spPr>
           <a:xfrm>
-            <a:off x="868680" y="2606040"/>
-            <a:ext cx="3017520" cy="1005840"/>
+            <a:off x="868680" y="2651760"/>
+            <a:ext cx="3017520" cy="1188720"/>
           </a:xfrm>
           <a:prstGeom prst="rect">
             <a:avLst/>
@@ -15498,7 +15367,7 @@
                 </a:solidFill>
                 <a:latin typeface="Segoe UI"/>
               </a:rPr>
-              <a:t>Регистрация и вход, пароль хранится в виде хеша, доступ по токену</a:t>
+              <a:t>Регистрация и вход, пароль в виде хеша, доступ по токену</a:t>
             </a:r>
           </a:p>
         </p:txBody>
@@ -15512,7 +15381,7 @@
         <p:spPr>
           <a:xfrm>
             <a:off x="4325112" y="1737360"/>
-            <a:ext cx="3456432" cy="1965960"/>
+            <a:ext cx="3456432" cy="2240280"/>
           </a:xfrm>
           <a:prstGeom prst="rect">
             <a:avLst/>
@@ -15599,8 +15468,8 @@
         </p:nvSpPr>
         <p:spPr>
           <a:xfrm>
-            <a:off x="4553712" y="2011680"/>
-            <a:ext cx="3017520" cy="457200"/>
+            <a:off x="4553712" y="1993392"/>
+            <a:ext cx="3017520" cy="502920"/>
           </a:xfrm>
           <a:prstGeom prst="rect">
             <a:avLst/>
@@ -15641,8 +15510,8 @@
         </p:nvSpPr>
         <p:spPr>
           <a:xfrm>
-            <a:off x="4553712" y="2606040"/>
-            <a:ext cx="3017520" cy="1005840"/>
+            <a:off x="4553712" y="2651760"/>
+            <a:ext cx="3017520" cy="1188720"/>
           </a:xfrm>
           <a:prstGeom prst="rect">
             <a:avLst/>
@@ -15670,7 +15539,7 @@
                 </a:solidFill>
                 <a:latin typeface="Segoe UI"/>
               </a:rPr>
-              <a:t>Создание, изменение и удаление, категория, сложность, время напоминания</a:t>
+              <a:t>Создание, изменение и удаление, категория и сложность</a:t>
             </a:r>
           </a:p>
         </p:txBody>
@@ -15684,7 +15553,7 @@
         <p:spPr>
           <a:xfrm>
             <a:off x="8010144" y="1737360"/>
-            <a:ext cx="3456432" cy="1965960"/>
+            <a:ext cx="3456432" cy="2240280"/>
           </a:xfrm>
           <a:prstGeom prst="rect">
             <a:avLst/>
@@ -15771,8 +15640,8 @@
         </p:nvSpPr>
         <p:spPr>
           <a:xfrm>
-            <a:off x="8238744" y="2011680"/>
-            <a:ext cx="3017520" cy="457200"/>
+            <a:off x="8238744" y="1993392"/>
+            <a:ext cx="3017520" cy="502920"/>
           </a:xfrm>
           <a:prstGeom prst="rect">
             <a:avLst/>
@@ -15800,7 +15669,7 @@
                 </a:solidFill>
                 <a:latin typeface="Segoe UI"/>
               </a:rPr>
-              <a:t>Отметка выполнения</a:t>
+              <a:t>Отметки</a:t>
             </a:r>
           </a:p>
         </p:txBody>
@@ -15813,8 +15682,8 @@
         </p:nvSpPr>
         <p:spPr>
           <a:xfrm>
-            <a:off x="8238744" y="2606040"/>
-            <a:ext cx="3017520" cy="1005840"/>
+            <a:off x="8238744" y="2651760"/>
+            <a:ext cx="3017520" cy="1188720"/>
           </a:xfrm>
           <a:prstGeom prst="rect">
             <a:avLst/>
@@ -15842,7 +15711,7 @@
                 </a:solidFill>
                 <a:latin typeface="Segoe UI"/>
               </a:rPr>
-              <a:t>Один клик, опыт начисляется автоматически, отметку можно отменить</a:t>
+              <a:t>Один клик, опыт начисляется автоматически</a:t>
             </a:r>
           </a:p>
         </p:txBody>
@@ -15855,8 +15724,8 @@
         </p:nvSpPr>
         <p:spPr>
           <a:xfrm>
-            <a:off x="640080" y="3931920"/>
-            <a:ext cx="3456432" cy="1965960"/>
+            <a:off x="640080" y="4114800"/>
+            <a:ext cx="3456432" cy="2240280"/>
           </a:xfrm>
           <a:prstGeom prst="rect">
             <a:avLst/>
@@ -15899,7 +15768,7 @@
         </p:nvSpPr>
         <p:spPr>
           <a:xfrm>
-            <a:off x="640080" y="3931920"/>
+            <a:off x="640080" y="4114800"/>
             <a:ext cx="3456432" cy="54864"/>
           </a:xfrm>
           <a:prstGeom prst="rect">
@@ -15943,8 +15812,8 @@
         </p:nvSpPr>
         <p:spPr>
           <a:xfrm>
-            <a:off x="868680" y="4206240"/>
-            <a:ext cx="3017520" cy="457200"/>
+            <a:off x="868680" y="4370832"/>
+            <a:ext cx="3017520" cy="502920"/>
           </a:xfrm>
           <a:prstGeom prst="rect">
             <a:avLst/>
@@ -15985,8 +15854,8 @@
         </p:nvSpPr>
         <p:spPr>
           <a:xfrm>
-            <a:off x="868680" y="4800600"/>
-            <a:ext cx="3017520" cy="1005840"/>
+            <a:off x="868680" y="5029200"/>
+            <a:ext cx="3017520" cy="1188720"/>
           </a:xfrm>
           <a:prstGeom prst="rect">
             <a:avLst/>
@@ -16014,7 +15883,7 @@
                 </a:solidFill>
                 <a:latin typeface="Segoe UI"/>
               </a:rPr>
-              <a:t>Опыт, уровень, прогресс до следующего, текущая и лучшая серия</a:t>
+              <a:t>Опыт, уровень, серия и прогресс до следующего</a:t>
             </a:r>
           </a:p>
         </p:txBody>
@@ -16027,8 +15896,8 @@
         </p:nvSpPr>
         <p:spPr>
           <a:xfrm>
-            <a:off x="4325112" y="3931920"/>
-            <a:ext cx="3456432" cy="1965960"/>
+            <a:off x="4325112" y="4114800"/>
+            <a:ext cx="3456432" cy="2240280"/>
           </a:xfrm>
           <a:prstGeom prst="rect">
             <a:avLst/>
@@ -16071,7 +15940,7 @@
         </p:nvSpPr>
         <p:spPr>
           <a:xfrm>
-            <a:off x="4325112" y="3931920"/>
+            <a:off x="4325112" y="4114800"/>
             <a:ext cx="3456432" cy="54864"/>
           </a:xfrm>
           <a:prstGeom prst="rect">
@@ -16115,8 +15984,8 @@
         </p:nvSpPr>
         <p:spPr>
           <a:xfrm>
-            <a:off x="4553712" y="4206240"/>
-            <a:ext cx="3017520" cy="457200"/>
+            <a:off x="4553712" y="4370832"/>
+            <a:ext cx="3017520" cy="502920"/>
           </a:xfrm>
           <a:prstGeom prst="rect">
             <a:avLst/>
@@ -16157,8 +16026,8 @@
         </p:nvSpPr>
         <p:spPr>
           <a:xfrm>
-            <a:off x="4553712" y="4800600"/>
-            <a:ext cx="3017520" cy="1005840"/>
+            <a:off x="4553712" y="5029200"/>
+            <a:ext cx="3017520" cy="1188720"/>
           </a:xfrm>
           <a:prstGeom prst="rect">
             <a:avLst/>
@@ -16186,7 +16055,7 @@
                 </a:solidFill>
                 <a:latin typeface="Segoe UI"/>
               </a:rPr>
-              <a:t>Сводка за день, неделю и месяц, график, процент выполнения</a:t>
+              <a:t>Сводка за день, неделю и месяц, график выполнения</a:t>
             </a:r>
           </a:p>
         </p:txBody>
@@ -16199,8 +16068,8 @@
         </p:nvSpPr>
         <p:spPr>
           <a:xfrm>
-            <a:off x="8010144" y="3931920"/>
-            <a:ext cx="3456432" cy="1965960"/>
+            <a:off x="8010144" y="4114800"/>
+            <a:ext cx="3456432" cy="2240280"/>
           </a:xfrm>
           <a:prstGeom prst="rect">
             <a:avLst/>
@@ -16243,7 +16112,7 @@
         </p:nvSpPr>
         <p:spPr>
           <a:xfrm>
-            <a:off x="8010144" y="3931920"/>
+            <a:off x="8010144" y="4114800"/>
             <a:ext cx="3456432" cy="54864"/>
           </a:xfrm>
           <a:prstGeom prst="rect">
@@ -16287,8 +16156,8 @@
         </p:nvSpPr>
         <p:spPr>
           <a:xfrm>
-            <a:off x="8238744" y="4206240"/>
-            <a:ext cx="3017520" cy="457200"/>
+            <a:off x="8238744" y="4370832"/>
+            <a:ext cx="3017520" cy="502920"/>
           </a:xfrm>
           <a:prstGeom prst="rect">
             <a:avLst/>
@@ -16316,7 +16185,7 @@
                 </a:solidFill>
                 <a:latin typeface="Segoe UI"/>
               </a:rPr>
-              <a:t>Достижения и профиль</a:t>
+              <a:t>Достижения</a:t>
             </a:r>
           </a:p>
         </p:txBody>
@@ -16329,8 +16198,8 @@
         </p:nvSpPr>
         <p:spPr>
           <a:xfrm>
-            <a:off x="8238744" y="4800600"/>
-            <a:ext cx="3017520" cy="1005840"/>
+            <a:off x="8238744" y="5029200"/>
+            <a:ext cx="3017520" cy="1188720"/>
           </a:xfrm>
           <a:prstGeom prst="rect">
             <a:avLst/>
@@ -16358,7 +16227,7 @@
                 </a:solidFill>
                 <a:latin typeface="Segoe UI"/>
               </a:rPr>
-              <a:t>Двенадцать достижений с условиями, аватар и общая статистика</a:t>
+              <a:t>Двенадцать достижений с условиями и наградами</a:t>
             </a:r>
           </a:p>
         </p:txBody>
@@ -16947,8 +16816,8 @@
         </p:nvSpPr>
         <p:spPr>
           <a:xfrm>
-            <a:off x="502920" y="2788920"/>
-            <a:ext cx="1143000" cy="365760"/>
+            <a:off x="365760" y="2743200"/>
+            <a:ext cx="1417320" cy="457200"/>
           </a:xfrm>
           <a:prstGeom prst="rect">
             <a:avLst/>
@@ -16970,7 +16839,7 @@
               </a:spcAft>
             </a:pPr>
             <a:r>
-              <a:rPr sz="2000" b="1">
+              <a:rPr sz="1800" b="1">
                 <a:solidFill>
                   <a:srgbClr val="0F172A"/>
                 </a:solidFill>
@@ -16989,8 +16858,8 @@
         </p:nvSpPr>
         <p:spPr>
           <a:xfrm>
-            <a:off x="502920" y="3154680"/>
-            <a:ext cx="1143000" cy="365760"/>
+            <a:off x="365760" y="3200400"/>
+            <a:ext cx="1417320" cy="365760"/>
           </a:xfrm>
           <a:prstGeom prst="rect">
             <a:avLst/>
@@ -17075,8 +16944,8 @@
         </p:nvSpPr>
         <p:spPr>
           <a:xfrm>
-            <a:off x="2194560" y="2788920"/>
-            <a:ext cx="1143000" cy="365760"/>
+            <a:off x="2057400" y="2743200"/>
+            <a:ext cx="1417320" cy="457200"/>
           </a:xfrm>
           <a:prstGeom prst="rect">
             <a:avLst/>
@@ -17098,7 +16967,7 @@
               </a:spcAft>
             </a:pPr>
             <a:r>
-              <a:rPr sz="2000" b="1">
+              <a:rPr sz="1800" b="1">
                 <a:solidFill>
                   <a:srgbClr val="0F172A"/>
                 </a:solidFill>
@@ -17117,8 +16986,8 @@
         </p:nvSpPr>
         <p:spPr>
           <a:xfrm>
-            <a:off x="2194560" y="3154680"/>
-            <a:ext cx="1143000" cy="365760"/>
+            <a:off x="2057400" y="3200400"/>
+            <a:ext cx="1417320" cy="365760"/>
           </a:xfrm>
           <a:prstGeom prst="rect">
             <a:avLst/>
@@ -17203,8 +17072,8 @@
         </p:nvSpPr>
         <p:spPr>
           <a:xfrm>
-            <a:off x="3886200" y="2788920"/>
-            <a:ext cx="1143000" cy="365760"/>
+            <a:off x="3749040" y="2743200"/>
+            <a:ext cx="1417320" cy="457200"/>
           </a:xfrm>
           <a:prstGeom prst="rect">
             <a:avLst/>
@@ -17226,7 +17095,7 @@
               </a:spcAft>
             </a:pPr>
             <a:r>
-              <a:rPr sz="2000" b="1">
+              <a:rPr sz="1800" b="1">
                 <a:solidFill>
                   <a:srgbClr val="0F172A"/>
                 </a:solidFill>
@@ -17245,8 +17114,8 @@
         </p:nvSpPr>
         <p:spPr>
           <a:xfrm>
-            <a:off x="3886200" y="3154680"/>
-            <a:ext cx="1143000" cy="365760"/>
+            <a:off x="3749040" y="3200400"/>
+            <a:ext cx="1417320" cy="365760"/>
           </a:xfrm>
           <a:prstGeom prst="rect">
             <a:avLst/>
@@ -17331,8 +17200,8 @@
         </p:nvSpPr>
         <p:spPr>
           <a:xfrm>
-            <a:off x="5577840" y="2788920"/>
-            <a:ext cx="1143000" cy="365760"/>
+            <a:off x="5440680" y="2743200"/>
+            <a:ext cx="1417320" cy="457200"/>
           </a:xfrm>
           <a:prstGeom prst="rect">
             <a:avLst/>
@@ -17354,7 +17223,7 @@
               </a:spcAft>
             </a:pPr>
             <a:r>
-              <a:rPr sz="2000" b="1">
+              <a:rPr sz="1800" b="1">
                 <a:solidFill>
                   <a:srgbClr val="0F172A"/>
                 </a:solidFill>
@@ -17373,8 +17242,8 @@
         </p:nvSpPr>
         <p:spPr>
           <a:xfrm>
-            <a:off x="5577840" y="3154680"/>
-            <a:ext cx="1143000" cy="365760"/>
+            <a:off x="5440680" y="3200400"/>
+            <a:ext cx="1417320" cy="365760"/>
           </a:xfrm>
           <a:prstGeom prst="rect">
             <a:avLst/>
@@ -17415,8 +17284,8 @@
         </p:nvSpPr>
         <p:spPr>
           <a:xfrm>
-            <a:off x="640080" y="3749039"/>
-            <a:ext cx="5349240" cy="2011680"/>
+            <a:off x="640080" y="3794760"/>
+            <a:ext cx="5349240" cy="2286000"/>
           </a:xfrm>
           <a:prstGeom prst="rect">
             <a:avLst/>
@@ -17459,7 +17328,7 @@
         </p:nvSpPr>
         <p:spPr>
           <a:xfrm>
-            <a:off x="914400" y="3931920"/>
+            <a:off x="914400" y="3977639"/>
             <a:ext cx="4846320" cy="457200"/>
           </a:xfrm>
           <a:prstGeom prst="rect">
@@ -17501,8 +17370,8 @@
         </p:nvSpPr>
         <p:spPr>
           <a:xfrm>
-            <a:off x="914400" y="4434840"/>
-            <a:ext cx="4846320" cy="1188720"/>
+            <a:off x="914400" y="4526280"/>
+            <a:ext cx="4846320" cy="1371600"/>
           </a:xfrm>
           <a:prstGeom prst="rect">
             <a:avLst/>
@@ -17530,7 +17399,7 @@
                 </a:solidFill>
                 <a:latin typeface="Segoe UI"/>
               </a:rPr>
-              <a:t>Хорошо читается на телефоне, поэтому взяли его для всего интерфейса и для презентации.</a:t>
+              <a:t>Хорошо читается на телефоне, поэтому взяли его для всего интерфейса.</a:t>
             </a:r>
           </a:p>
         </p:txBody>
@@ -17543,8 +17412,8 @@
         </p:nvSpPr>
         <p:spPr>
           <a:xfrm>
-            <a:off x="6263640" y="3749039"/>
-            <a:ext cx="5257800" cy="2011680"/>
+            <a:off x="6263640" y="3794760"/>
+            <a:ext cx="5257800" cy="2286000"/>
           </a:xfrm>
           <a:prstGeom prst="rect">
             <a:avLst/>
@@ -17587,7 +17456,7 @@
         </p:nvSpPr>
         <p:spPr>
           <a:xfrm>
-            <a:off x="6537960" y="3931920"/>
+            <a:off x="6537960" y="3977639"/>
             <a:ext cx="4754880" cy="457200"/>
           </a:xfrm>
           <a:prstGeom prst="rect">
@@ -17629,8 +17498,8 @@
         </p:nvSpPr>
         <p:spPr>
           <a:xfrm>
-            <a:off x="6537960" y="4434840"/>
-            <a:ext cx="4754880" cy="1188720"/>
+            <a:off x="6537960" y="4526280"/>
+            <a:ext cx="4754880" cy="1371600"/>
           </a:xfrm>
           <a:prstGeom prst="rect">
             <a:avLst/>
@@ -17658,7 +17527,7 @@
                 </a:solidFill>
                 <a:latin typeface="Segoe UI"/>
               </a:rPr>
-              <a:t>Фиолетовый — цвет прогресса и игры. Зелёный отмечает выполненное, оранжевый — серию. Цвет используется только для действий и статусов.</a:t>
+              <a:t>Фиолетовый — цвет прогресса. Зелёный — выполненное, оранжевый — серия.</a:t>
             </a:r>
           </a:p>
         </p:txBody>
